--- a/Figures & Presentables/Results Tables.pptx
+++ b/Figures & Presentables/Results Tables.pptx
@@ -4,8 +4,13 @@
   <p:sldMasterIdLst>
     <p:sldMasterId id="2147483648" r:id="rId1"/>
   </p:sldMasterIdLst>
+  <p:notesMasterIdLst>
+    <p:notesMasterId r:id="rId5"/>
+  </p:notesMasterIdLst>
   <p:sldIdLst>
     <p:sldId id="256" r:id="rId2"/>
+    <p:sldId id="257" r:id="rId3"/>
+    <p:sldId id="258" r:id="rId4"/>
   </p:sldIdLst>
   <p:sldSz cx="12192000" cy="6858000"/>
   <p:notesSz cx="6858000" cy="9144000"/>
@@ -104,7 +109,540 @@
       </a:defRPr>
     </a:lvl9pPr>
   </p:defaultTextStyle>
+  <p:extLst>
+    <p:ext uri="{EFAFB233-063F-42B5-8137-9DF3F51BA10A}">
+      <p15:sldGuideLst xmlns:p15="http://schemas.microsoft.com/office/powerpoint/2012/main">
+        <p15:guide id="1" orient="horz" pos="2160" userDrawn="1">
+          <p15:clr>
+            <a:srgbClr val="A4A3A4"/>
+          </p15:clr>
+        </p15:guide>
+        <p15:guide id="2" pos="3840" userDrawn="1">
+          <p15:clr>
+            <a:srgbClr val="A4A3A4"/>
+          </p15:clr>
+        </p15:guide>
+      </p15:sldGuideLst>
+    </p:ext>
+  </p:extLst>
 </p:presentation>
+</file>
+
+<file path=ppt/notesMasters/notesMaster1.xml><?xml version="1.0" encoding="utf-8"?>
+<p:notesMaster xmlns:a="http://schemas.openxmlformats.org/drawingml/2006/main" xmlns:r="http://schemas.openxmlformats.org/officeDocument/2006/relationships" xmlns:p="http://schemas.openxmlformats.org/presentationml/2006/main">
+  <p:cSld>
+    <p:bg>
+      <p:bgRef idx="1001">
+        <a:schemeClr val="bg1"/>
+      </p:bgRef>
+    </p:bg>
+    <p:spTree>
+      <p:nvGrpSpPr>
+        <p:cNvPr id="1" name=""/>
+        <p:cNvGrpSpPr/>
+        <p:nvPr/>
+      </p:nvGrpSpPr>
+      <p:grpSpPr>
+        <a:xfrm>
+          <a:off x="0" y="0"/>
+          <a:ext cx="0" cy="0"/>
+          <a:chOff x="0" y="0"/>
+          <a:chExt cx="0" cy="0"/>
+        </a:xfrm>
+      </p:grpSpPr>
+      <p:sp>
+        <p:nvSpPr>
+          <p:cNvPr id="2" name="Header Placeholder 1"/>
+          <p:cNvSpPr>
+            <a:spLocks noGrp="1"/>
+          </p:cNvSpPr>
+          <p:nvPr>
+            <p:ph type="hdr" sz="quarter"/>
+          </p:nvPr>
+        </p:nvSpPr>
+        <p:spPr>
+          <a:xfrm>
+            <a:off x="0" y="0"/>
+            <a:ext cx="2971800" cy="458788"/>
+          </a:xfrm>
+          <a:prstGeom prst="rect">
+            <a:avLst/>
+          </a:prstGeom>
+        </p:spPr>
+        <p:txBody>
+          <a:bodyPr vert="horz" lIns="91440" tIns="45720" rIns="91440" bIns="45720" rtlCol="0"/>
+          <a:lstStyle>
+            <a:lvl1pPr algn="l">
+              <a:defRPr sz="1200"/>
+            </a:lvl1pPr>
+          </a:lstStyle>
+          <a:p>
+            <a:endParaRPr lang="en-GB"/>
+          </a:p>
+        </p:txBody>
+      </p:sp>
+      <p:sp>
+        <p:nvSpPr>
+          <p:cNvPr id="3" name="Date Placeholder 2"/>
+          <p:cNvSpPr>
+            <a:spLocks noGrp="1"/>
+          </p:cNvSpPr>
+          <p:nvPr>
+            <p:ph type="dt" idx="1"/>
+          </p:nvPr>
+        </p:nvSpPr>
+        <p:spPr>
+          <a:xfrm>
+            <a:off x="3884613" y="0"/>
+            <a:ext cx="2971800" cy="458788"/>
+          </a:xfrm>
+          <a:prstGeom prst="rect">
+            <a:avLst/>
+          </a:prstGeom>
+        </p:spPr>
+        <p:txBody>
+          <a:bodyPr vert="horz" lIns="91440" tIns="45720" rIns="91440" bIns="45720" rtlCol="0"/>
+          <a:lstStyle>
+            <a:lvl1pPr algn="r">
+              <a:defRPr sz="1200"/>
+            </a:lvl1pPr>
+          </a:lstStyle>
+          <a:p>
+            <a:fld id="{B01CF91F-3F63-1F42-9D5C-94D20AA3F542}" type="datetimeFigureOut">
+              <a:rPr lang="en-GB" smtClean="0"/>
+              <a:t>09/10/2025</a:t>
+            </a:fld>
+            <a:endParaRPr lang="en-GB"/>
+          </a:p>
+        </p:txBody>
+      </p:sp>
+      <p:sp>
+        <p:nvSpPr>
+          <p:cNvPr id="4" name="Slide Image Placeholder 3"/>
+          <p:cNvSpPr>
+            <a:spLocks noGrp="1" noRot="1" noChangeAspect="1"/>
+          </p:cNvSpPr>
+          <p:nvPr>
+            <p:ph type="sldImg" idx="2"/>
+          </p:nvPr>
+        </p:nvSpPr>
+        <p:spPr>
+          <a:xfrm>
+            <a:off x="685800" y="1143000"/>
+            <a:ext cx="5486400" cy="3086100"/>
+          </a:xfrm>
+          <a:prstGeom prst="rect">
+            <a:avLst/>
+          </a:prstGeom>
+          <a:noFill/>
+          <a:ln w="12700">
+            <a:solidFill>
+              <a:prstClr val="black"/>
+            </a:solidFill>
+          </a:ln>
+        </p:spPr>
+        <p:txBody>
+          <a:bodyPr vert="horz" lIns="91440" tIns="45720" rIns="91440" bIns="45720" rtlCol="0" anchor="ctr"/>
+          <a:lstStyle/>
+          <a:p>
+            <a:endParaRPr lang="en-GB"/>
+          </a:p>
+        </p:txBody>
+      </p:sp>
+      <p:sp>
+        <p:nvSpPr>
+          <p:cNvPr id="5" name="Notes Placeholder 4"/>
+          <p:cNvSpPr>
+            <a:spLocks noGrp="1"/>
+          </p:cNvSpPr>
+          <p:nvPr>
+            <p:ph type="body" sz="quarter" idx="3"/>
+          </p:nvPr>
+        </p:nvSpPr>
+        <p:spPr>
+          <a:xfrm>
+            <a:off x="685800" y="4400550"/>
+            <a:ext cx="5486400" cy="3600450"/>
+          </a:xfrm>
+          <a:prstGeom prst="rect">
+            <a:avLst/>
+          </a:prstGeom>
+        </p:spPr>
+        <p:txBody>
+          <a:bodyPr vert="horz" lIns="91440" tIns="45720" rIns="91440" bIns="45720" rtlCol="0"/>
+          <a:lstStyle/>
+          <a:p>
+            <a:pPr lvl="0"/>
+            <a:r>
+              <a:rPr lang="en-GB"/>
+              <a:t>Click to edit Master text styles</a:t>
+            </a:r>
+          </a:p>
+          <a:p>
+            <a:pPr lvl="1"/>
+            <a:r>
+              <a:rPr lang="en-GB"/>
+              <a:t>Second level</a:t>
+            </a:r>
+          </a:p>
+          <a:p>
+            <a:pPr lvl="2"/>
+            <a:r>
+              <a:rPr lang="en-GB"/>
+              <a:t>Third level</a:t>
+            </a:r>
+          </a:p>
+          <a:p>
+            <a:pPr lvl="3"/>
+            <a:r>
+              <a:rPr lang="en-GB"/>
+              <a:t>Fourth level</a:t>
+            </a:r>
+          </a:p>
+          <a:p>
+            <a:pPr lvl="4"/>
+            <a:r>
+              <a:rPr lang="en-GB"/>
+              <a:t>Fifth level</a:t>
+            </a:r>
+          </a:p>
+        </p:txBody>
+      </p:sp>
+      <p:sp>
+        <p:nvSpPr>
+          <p:cNvPr id="6" name="Footer Placeholder 5"/>
+          <p:cNvSpPr>
+            <a:spLocks noGrp="1"/>
+          </p:cNvSpPr>
+          <p:nvPr>
+            <p:ph type="ftr" sz="quarter" idx="4"/>
+          </p:nvPr>
+        </p:nvSpPr>
+        <p:spPr>
+          <a:xfrm>
+            <a:off x="0" y="8685213"/>
+            <a:ext cx="2971800" cy="458787"/>
+          </a:xfrm>
+          <a:prstGeom prst="rect">
+            <a:avLst/>
+          </a:prstGeom>
+        </p:spPr>
+        <p:txBody>
+          <a:bodyPr vert="horz" lIns="91440" tIns="45720" rIns="91440" bIns="45720" rtlCol="0" anchor="b"/>
+          <a:lstStyle>
+            <a:lvl1pPr algn="l">
+              <a:defRPr sz="1200"/>
+            </a:lvl1pPr>
+          </a:lstStyle>
+          <a:p>
+            <a:endParaRPr lang="en-GB"/>
+          </a:p>
+        </p:txBody>
+      </p:sp>
+      <p:sp>
+        <p:nvSpPr>
+          <p:cNvPr id="7" name="Slide Number Placeholder 6"/>
+          <p:cNvSpPr>
+            <a:spLocks noGrp="1"/>
+          </p:cNvSpPr>
+          <p:nvPr>
+            <p:ph type="sldNum" sz="quarter" idx="5"/>
+          </p:nvPr>
+        </p:nvSpPr>
+        <p:spPr>
+          <a:xfrm>
+            <a:off x="3884613" y="8685213"/>
+            <a:ext cx="2971800" cy="458787"/>
+          </a:xfrm>
+          <a:prstGeom prst="rect">
+            <a:avLst/>
+          </a:prstGeom>
+        </p:spPr>
+        <p:txBody>
+          <a:bodyPr vert="horz" lIns="91440" tIns="45720" rIns="91440" bIns="45720" rtlCol="0" anchor="b"/>
+          <a:lstStyle>
+            <a:lvl1pPr algn="r">
+              <a:defRPr sz="1200"/>
+            </a:lvl1pPr>
+          </a:lstStyle>
+          <a:p>
+            <a:fld id="{CC89154D-D3D8-E441-843E-F4B7342356D4}" type="slidenum">
+              <a:rPr lang="en-GB" smtClean="0"/>
+              <a:t>‹#›</a:t>
+            </a:fld>
+            <a:endParaRPr lang="en-GB"/>
+          </a:p>
+        </p:txBody>
+      </p:sp>
+    </p:spTree>
+    <p:extLst>
+      <p:ext uri="{BB962C8B-B14F-4D97-AF65-F5344CB8AC3E}">
+        <p14:creationId xmlns:p14="http://schemas.microsoft.com/office/powerpoint/2010/main" val="2620288289"/>
+      </p:ext>
+    </p:extLst>
+  </p:cSld>
+  <p:clrMap bg1="lt1" tx1="dk1" bg2="lt2" tx2="dk2" accent1="accent1" accent2="accent2" accent3="accent3" accent4="accent4" accent5="accent5" accent6="accent6" hlink="hlink" folHlink="folHlink"/>
+  <p:notesStyle>
+    <a:lvl1pPr marL="0" algn="l" defTabSz="914400" rtl="0" eaLnBrk="1" latinLnBrk="0" hangingPunct="1">
+      <a:defRPr sz="1200" kern="1200">
+        <a:solidFill>
+          <a:schemeClr val="tx1"/>
+        </a:solidFill>
+        <a:latin typeface="+mn-lt"/>
+        <a:ea typeface="+mn-ea"/>
+        <a:cs typeface="+mn-cs"/>
+      </a:defRPr>
+    </a:lvl1pPr>
+    <a:lvl2pPr marL="457200" algn="l" defTabSz="914400" rtl="0" eaLnBrk="1" latinLnBrk="0" hangingPunct="1">
+      <a:defRPr sz="1200" kern="1200">
+        <a:solidFill>
+          <a:schemeClr val="tx1"/>
+        </a:solidFill>
+        <a:latin typeface="+mn-lt"/>
+        <a:ea typeface="+mn-ea"/>
+        <a:cs typeface="+mn-cs"/>
+      </a:defRPr>
+    </a:lvl2pPr>
+    <a:lvl3pPr marL="914400" algn="l" defTabSz="914400" rtl="0" eaLnBrk="1" latinLnBrk="0" hangingPunct="1">
+      <a:defRPr sz="1200" kern="1200">
+        <a:solidFill>
+          <a:schemeClr val="tx1"/>
+        </a:solidFill>
+        <a:latin typeface="+mn-lt"/>
+        <a:ea typeface="+mn-ea"/>
+        <a:cs typeface="+mn-cs"/>
+      </a:defRPr>
+    </a:lvl3pPr>
+    <a:lvl4pPr marL="1371600" algn="l" defTabSz="914400" rtl="0" eaLnBrk="1" latinLnBrk="0" hangingPunct="1">
+      <a:defRPr sz="1200" kern="1200">
+        <a:solidFill>
+          <a:schemeClr val="tx1"/>
+        </a:solidFill>
+        <a:latin typeface="+mn-lt"/>
+        <a:ea typeface="+mn-ea"/>
+        <a:cs typeface="+mn-cs"/>
+      </a:defRPr>
+    </a:lvl4pPr>
+    <a:lvl5pPr marL="1828800" algn="l" defTabSz="914400" rtl="0" eaLnBrk="1" latinLnBrk="0" hangingPunct="1">
+      <a:defRPr sz="1200" kern="1200">
+        <a:solidFill>
+          <a:schemeClr val="tx1"/>
+        </a:solidFill>
+        <a:latin typeface="+mn-lt"/>
+        <a:ea typeface="+mn-ea"/>
+        <a:cs typeface="+mn-cs"/>
+      </a:defRPr>
+    </a:lvl5pPr>
+    <a:lvl6pPr marL="2286000" algn="l" defTabSz="914400" rtl="0" eaLnBrk="1" latinLnBrk="0" hangingPunct="1">
+      <a:defRPr sz="1200" kern="1200">
+        <a:solidFill>
+          <a:schemeClr val="tx1"/>
+        </a:solidFill>
+        <a:latin typeface="+mn-lt"/>
+        <a:ea typeface="+mn-ea"/>
+        <a:cs typeface="+mn-cs"/>
+      </a:defRPr>
+    </a:lvl6pPr>
+    <a:lvl7pPr marL="2743200" algn="l" defTabSz="914400" rtl="0" eaLnBrk="1" latinLnBrk="0" hangingPunct="1">
+      <a:defRPr sz="1200" kern="1200">
+        <a:solidFill>
+          <a:schemeClr val="tx1"/>
+        </a:solidFill>
+        <a:latin typeface="+mn-lt"/>
+        <a:ea typeface="+mn-ea"/>
+        <a:cs typeface="+mn-cs"/>
+      </a:defRPr>
+    </a:lvl7pPr>
+    <a:lvl8pPr marL="3200400" algn="l" defTabSz="914400" rtl="0" eaLnBrk="1" latinLnBrk="0" hangingPunct="1">
+      <a:defRPr sz="1200" kern="1200">
+        <a:solidFill>
+          <a:schemeClr val="tx1"/>
+        </a:solidFill>
+        <a:latin typeface="+mn-lt"/>
+        <a:ea typeface="+mn-ea"/>
+        <a:cs typeface="+mn-cs"/>
+      </a:defRPr>
+    </a:lvl8pPr>
+    <a:lvl9pPr marL="3657600" algn="l" defTabSz="914400" rtl="0" eaLnBrk="1" latinLnBrk="0" hangingPunct="1">
+      <a:defRPr sz="1200" kern="1200">
+        <a:solidFill>
+          <a:schemeClr val="tx1"/>
+        </a:solidFill>
+        <a:latin typeface="+mn-lt"/>
+        <a:ea typeface="+mn-ea"/>
+        <a:cs typeface="+mn-cs"/>
+      </a:defRPr>
+    </a:lvl9pPr>
+  </p:notesStyle>
+</p:notesMaster>
+</file>
+
+<file path=ppt/notesSlides/notesSlide1.xml><?xml version="1.0" encoding="utf-8"?>
+<p:notes xmlns:a="http://schemas.openxmlformats.org/drawingml/2006/main" xmlns:r="http://schemas.openxmlformats.org/officeDocument/2006/relationships" xmlns:p="http://schemas.openxmlformats.org/presentationml/2006/main">
+  <p:cSld>
+    <p:spTree>
+      <p:nvGrpSpPr>
+        <p:cNvPr id="1" name=""/>
+        <p:cNvGrpSpPr/>
+        <p:nvPr/>
+      </p:nvGrpSpPr>
+      <p:grpSpPr>
+        <a:xfrm>
+          <a:off x="0" y="0"/>
+          <a:ext cx="0" cy="0"/>
+          <a:chOff x="0" y="0"/>
+          <a:chExt cx="0" cy="0"/>
+        </a:xfrm>
+      </p:grpSpPr>
+      <p:sp>
+        <p:nvSpPr>
+          <p:cNvPr id="2" name="Slide Image Placeholder 1"/>
+          <p:cNvSpPr>
+            <a:spLocks noGrp="1" noRot="1" noChangeAspect="1"/>
+          </p:cNvSpPr>
+          <p:nvPr>
+            <p:ph type="sldImg"/>
+          </p:nvPr>
+        </p:nvSpPr>
+        <p:spPr/>
+      </p:sp>
+      <p:sp>
+        <p:nvSpPr>
+          <p:cNvPr id="3" name="Notes Placeholder 2"/>
+          <p:cNvSpPr>
+            <a:spLocks noGrp="1"/>
+          </p:cNvSpPr>
+          <p:nvPr>
+            <p:ph type="body" idx="1"/>
+          </p:nvPr>
+        </p:nvSpPr>
+        <p:spPr/>
+        <p:txBody>
+          <a:bodyPr/>
+          <a:lstStyle/>
+          <a:p>
+            <a:endParaRPr lang="en-GB"/>
+          </a:p>
+        </p:txBody>
+      </p:sp>
+      <p:sp>
+        <p:nvSpPr>
+          <p:cNvPr id="4" name="Slide Number Placeholder 3"/>
+          <p:cNvSpPr>
+            <a:spLocks noGrp="1"/>
+          </p:cNvSpPr>
+          <p:nvPr>
+            <p:ph type="sldNum" sz="quarter" idx="5"/>
+          </p:nvPr>
+        </p:nvSpPr>
+        <p:spPr/>
+        <p:txBody>
+          <a:bodyPr/>
+          <a:lstStyle/>
+          <a:p>
+            <a:fld id="{CC89154D-D3D8-E441-843E-F4B7342356D4}" type="slidenum">
+              <a:rPr lang="en-GB" smtClean="0"/>
+              <a:t>1</a:t>
+            </a:fld>
+            <a:endParaRPr lang="en-GB"/>
+          </a:p>
+        </p:txBody>
+      </p:sp>
+    </p:spTree>
+    <p:extLst>
+      <p:ext uri="{BB962C8B-B14F-4D97-AF65-F5344CB8AC3E}">
+        <p14:creationId xmlns:p14="http://schemas.microsoft.com/office/powerpoint/2010/main" val="3570993805"/>
+      </p:ext>
+    </p:extLst>
+  </p:cSld>
+  <p:clrMapOvr>
+    <a:masterClrMapping/>
+  </p:clrMapOvr>
+</p:notes>
+</file>
+
+<file path=ppt/notesSlides/notesSlide2.xml><?xml version="1.0" encoding="utf-8"?>
+<p:notes xmlns:a="http://schemas.openxmlformats.org/drawingml/2006/main" xmlns:r="http://schemas.openxmlformats.org/officeDocument/2006/relationships" xmlns:p="http://schemas.openxmlformats.org/presentationml/2006/main">
+  <p:cSld>
+    <p:spTree>
+      <p:nvGrpSpPr>
+        <p:cNvPr id="1" name=""/>
+        <p:cNvGrpSpPr/>
+        <p:nvPr/>
+      </p:nvGrpSpPr>
+      <p:grpSpPr>
+        <a:xfrm>
+          <a:off x="0" y="0"/>
+          <a:ext cx="0" cy="0"/>
+          <a:chOff x="0" y="0"/>
+          <a:chExt cx="0" cy="0"/>
+        </a:xfrm>
+      </p:grpSpPr>
+      <p:sp>
+        <p:nvSpPr>
+          <p:cNvPr id="2" name="Slide Image Placeholder 1"/>
+          <p:cNvSpPr>
+            <a:spLocks noGrp="1" noRot="1" noChangeAspect="1"/>
+          </p:cNvSpPr>
+          <p:nvPr>
+            <p:ph type="sldImg"/>
+          </p:nvPr>
+        </p:nvSpPr>
+        <p:spPr/>
+      </p:sp>
+      <p:sp>
+        <p:nvSpPr>
+          <p:cNvPr id="3" name="Notes Placeholder 2"/>
+          <p:cNvSpPr>
+            <a:spLocks noGrp="1"/>
+          </p:cNvSpPr>
+          <p:nvPr>
+            <p:ph type="body" idx="1"/>
+          </p:nvPr>
+        </p:nvSpPr>
+        <p:spPr/>
+        <p:txBody>
+          <a:bodyPr/>
+          <a:lstStyle/>
+          <a:p>
+            <a:endParaRPr lang="en-GB"/>
+          </a:p>
+        </p:txBody>
+      </p:sp>
+      <p:sp>
+        <p:nvSpPr>
+          <p:cNvPr id="4" name="Slide Number Placeholder 3"/>
+          <p:cNvSpPr>
+            <a:spLocks noGrp="1"/>
+          </p:cNvSpPr>
+          <p:nvPr>
+            <p:ph type="sldNum" sz="quarter" idx="5"/>
+          </p:nvPr>
+        </p:nvSpPr>
+        <p:spPr/>
+        <p:txBody>
+          <a:bodyPr/>
+          <a:lstStyle/>
+          <a:p>
+            <a:fld id="{CC89154D-D3D8-E441-843E-F4B7342356D4}" type="slidenum">
+              <a:rPr lang="en-GB" smtClean="0"/>
+              <a:t>2</a:t>
+            </a:fld>
+            <a:endParaRPr lang="en-GB"/>
+          </a:p>
+        </p:txBody>
+      </p:sp>
+    </p:spTree>
+    <p:extLst>
+      <p:ext uri="{BB962C8B-B14F-4D97-AF65-F5344CB8AC3E}">
+        <p14:creationId xmlns:p14="http://schemas.microsoft.com/office/powerpoint/2010/main" val="848808626"/>
+      </p:ext>
+    </p:extLst>
+  </p:cSld>
+  <p:clrMapOvr>
+    <a:masterClrMapping/>
+  </p:clrMapOvr>
+</p:notes>
 </file>
 
 <file path=ppt/slideLayouts/slideLayout1.xml><?xml version="1.0" encoding="utf-8"?>
@@ -254,7 +792,7 @@
           <a:p>
             <a:fld id="{4F519A75-24C2-BE48-844B-19E784565232}" type="datetimeFigureOut">
               <a:rPr lang="en-GB" smtClean="0"/>
-              <a:t>08/07/2025</a:t>
+              <a:t>09/10/2025</a:t>
             </a:fld>
             <a:endParaRPr lang="en-GB"/>
           </a:p>
@@ -452,7 +990,7 @@
           <a:p>
             <a:fld id="{4F519A75-24C2-BE48-844B-19E784565232}" type="datetimeFigureOut">
               <a:rPr lang="en-GB" smtClean="0"/>
-              <a:t>08/07/2025</a:t>
+              <a:t>09/10/2025</a:t>
             </a:fld>
             <a:endParaRPr lang="en-GB"/>
           </a:p>
@@ -660,7 +1198,7 @@
           <a:p>
             <a:fld id="{4F519A75-24C2-BE48-844B-19E784565232}" type="datetimeFigureOut">
               <a:rPr lang="en-GB" smtClean="0"/>
-              <a:t>08/07/2025</a:t>
+              <a:t>09/10/2025</a:t>
             </a:fld>
             <a:endParaRPr lang="en-GB"/>
           </a:p>
@@ -858,7 +1396,7 @@
           <a:p>
             <a:fld id="{4F519A75-24C2-BE48-844B-19E784565232}" type="datetimeFigureOut">
               <a:rPr lang="en-GB" smtClean="0"/>
-              <a:t>08/07/2025</a:t>
+              <a:t>09/10/2025</a:t>
             </a:fld>
             <a:endParaRPr lang="en-GB"/>
           </a:p>
@@ -1133,7 +1671,7 @@
           <a:p>
             <a:fld id="{4F519A75-24C2-BE48-844B-19E784565232}" type="datetimeFigureOut">
               <a:rPr lang="en-GB" smtClean="0"/>
-              <a:t>08/07/2025</a:t>
+              <a:t>09/10/2025</a:t>
             </a:fld>
             <a:endParaRPr lang="en-GB"/>
           </a:p>
@@ -1398,7 +1936,7 @@
           <a:p>
             <a:fld id="{4F519A75-24C2-BE48-844B-19E784565232}" type="datetimeFigureOut">
               <a:rPr lang="en-GB" smtClean="0"/>
-              <a:t>08/07/2025</a:t>
+              <a:t>09/10/2025</a:t>
             </a:fld>
             <a:endParaRPr lang="en-GB"/>
           </a:p>
@@ -1810,7 +2348,7 @@
           <a:p>
             <a:fld id="{4F519A75-24C2-BE48-844B-19E784565232}" type="datetimeFigureOut">
               <a:rPr lang="en-GB" smtClean="0"/>
-              <a:t>08/07/2025</a:t>
+              <a:t>09/10/2025</a:t>
             </a:fld>
             <a:endParaRPr lang="en-GB"/>
           </a:p>
@@ -1951,7 +2489,7 @@
           <a:p>
             <a:fld id="{4F519A75-24C2-BE48-844B-19E784565232}" type="datetimeFigureOut">
               <a:rPr lang="en-GB" smtClean="0"/>
-              <a:t>08/07/2025</a:t>
+              <a:t>09/10/2025</a:t>
             </a:fld>
             <a:endParaRPr lang="en-GB"/>
           </a:p>
@@ -2064,7 +2602,7 @@
           <a:p>
             <a:fld id="{4F519A75-24C2-BE48-844B-19E784565232}" type="datetimeFigureOut">
               <a:rPr lang="en-GB" smtClean="0"/>
-              <a:t>08/07/2025</a:t>
+              <a:t>09/10/2025</a:t>
             </a:fld>
             <a:endParaRPr lang="en-GB"/>
           </a:p>
@@ -2375,7 +2913,7 @@
           <a:p>
             <a:fld id="{4F519A75-24C2-BE48-844B-19E784565232}" type="datetimeFigureOut">
               <a:rPr lang="en-GB" smtClean="0"/>
-              <a:t>08/07/2025</a:t>
+              <a:t>09/10/2025</a:t>
             </a:fld>
             <a:endParaRPr lang="en-GB"/>
           </a:p>
@@ -2663,7 +3201,7 @@
           <a:p>
             <a:fld id="{4F519A75-24C2-BE48-844B-19E784565232}" type="datetimeFigureOut">
               <a:rPr lang="en-GB" smtClean="0"/>
-              <a:t>08/07/2025</a:t>
+              <a:t>09/10/2025</a:t>
             </a:fld>
             <a:endParaRPr lang="en-GB"/>
           </a:p>
@@ -2904,7 +3442,7 @@
           <a:p>
             <a:fld id="{4F519A75-24C2-BE48-844B-19E784565232}" type="datetimeFigureOut">
               <a:rPr lang="en-GB" smtClean="0"/>
-              <a:t>08/07/2025</a:t>
+              <a:t>09/10/2025</a:t>
             </a:fld>
             <a:endParaRPr lang="en-GB"/>
           </a:p>
@@ -5674,6 +6212,1282 @@
 </p:sld>
 </file>
 
+<file path=ppt/slides/slide2.xml><?xml version="1.0" encoding="utf-8"?>
+<p:sld xmlns:a="http://schemas.openxmlformats.org/drawingml/2006/main" xmlns:r="http://schemas.openxmlformats.org/officeDocument/2006/relationships" xmlns:p="http://schemas.openxmlformats.org/presentationml/2006/main">
+  <p:cSld>
+    <p:spTree>
+      <p:nvGrpSpPr>
+        <p:cNvPr id="1" name=""/>
+        <p:cNvGrpSpPr/>
+        <p:nvPr/>
+      </p:nvGrpSpPr>
+      <p:grpSpPr>
+        <a:xfrm>
+          <a:off x="0" y="0"/>
+          <a:ext cx="0" cy="0"/>
+          <a:chOff x="0" y="0"/>
+          <a:chExt cx="0" cy="0"/>
+        </a:xfrm>
+      </p:grpSpPr>
+      <p:grpSp>
+        <p:nvGrpSpPr>
+          <p:cNvPr id="17" name="Group 16">
+            <a:extLst>
+              <a:ext uri="{FF2B5EF4-FFF2-40B4-BE49-F238E27FC236}">
+                <a16:creationId xmlns:a16="http://schemas.microsoft.com/office/drawing/2014/main" id="{1DF5E5DB-0A99-C2D4-2F17-1D8B8FE92BA7}"/>
+              </a:ext>
+            </a:extLst>
+          </p:cNvPr>
+          <p:cNvGrpSpPr/>
+          <p:nvPr/>
+        </p:nvGrpSpPr>
+        <p:grpSpPr>
+          <a:xfrm>
+            <a:off x="1947563" y="1"/>
+            <a:ext cx="6212105" cy="6850026"/>
+            <a:chOff x="2271486" y="357187"/>
+            <a:chExt cx="5888182" cy="6492839"/>
+          </a:xfrm>
+        </p:grpSpPr>
+        <p:pic>
+          <p:nvPicPr>
+            <p:cNvPr id="5" name="Picture 4">
+              <a:extLst>
+                <a:ext uri="{FF2B5EF4-FFF2-40B4-BE49-F238E27FC236}">
+                  <a16:creationId xmlns:a16="http://schemas.microsoft.com/office/drawing/2014/main" id="{6E24BD20-9664-D76D-7D74-71577A8F1D5A}"/>
+                </a:ext>
+              </a:extLst>
+            </p:cNvPr>
+            <p:cNvPicPr>
+              <a:picLocks noChangeAspect="1"/>
+            </p:cNvPicPr>
+            <p:nvPr/>
+          </p:nvPicPr>
+          <p:blipFill>
+            <a:blip r:embed="rId3"/>
+            <a:srcRect t="5325"/>
+            <a:stretch/>
+          </p:blipFill>
+          <p:spPr>
+            <a:xfrm>
+              <a:off x="2271486" y="357187"/>
+              <a:ext cx="5888182" cy="6492839"/>
+            </a:xfrm>
+            <a:prstGeom prst="rect">
+              <a:avLst/>
+            </a:prstGeom>
+          </p:spPr>
+        </p:pic>
+        <p:sp>
+          <p:nvSpPr>
+            <p:cNvPr id="16" name="Rectangle 15">
+              <a:extLst>
+                <a:ext uri="{FF2B5EF4-FFF2-40B4-BE49-F238E27FC236}">
+                  <a16:creationId xmlns:a16="http://schemas.microsoft.com/office/drawing/2014/main" id="{791594E5-4412-86FB-65F9-7A5693FC5E0E}"/>
+                </a:ext>
+              </a:extLst>
+            </p:cNvPr>
+            <p:cNvSpPr/>
+            <p:nvPr/>
+          </p:nvSpPr>
+          <p:spPr>
+            <a:xfrm>
+              <a:off x="5289081" y="685800"/>
+              <a:ext cx="2765421" cy="6023007"/>
+            </a:xfrm>
+            <a:prstGeom prst="rect">
+              <a:avLst/>
+            </a:prstGeom>
+            <a:noFill/>
+            <a:ln w="9525">
+              <a:solidFill>
+                <a:schemeClr val="tx1"/>
+              </a:solidFill>
+            </a:ln>
+          </p:spPr>
+          <p:style>
+            <a:lnRef idx="2">
+              <a:schemeClr val="accent1">
+                <a:shade val="15000"/>
+              </a:schemeClr>
+            </a:lnRef>
+            <a:fillRef idx="1">
+              <a:schemeClr val="accent1"/>
+            </a:fillRef>
+            <a:effectRef idx="0">
+              <a:schemeClr val="accent1"/>
+            </a:effectRef>
+            <a:fontRef idx="minor">
+              <a:schemeClr val="lt1"/>
+            </a:fontRef>
+          </p:style>
+          <p:txBody>
+            <a:bodyPr rtlCol="0" anchor="ctr"/>
+            <a:lstStyle/>
+            <a:p>
+              <a:pPr algn="ctr"/>
+              <a:endParaRPr lang="en-GB"/>
+            </a:p>
+          </p:txBody>
+        </p:sp>
+      </p:grpSp>
+      <p:sp>
+        <p:nvSpPr>
+          <p:cNvPr id="18" name="Rectangle 17">
+            <a:extLst>
+              <a:ext uri="{FF2B5EF4-FFF2-40B4-BE49-F238E27FC236}">
+                <a16:creationId xmlns:a16="http://schemas.microsoft.com/office/drawing/2014/main" id="{E0D8074B-8806-2C8A-E874-1F858B5D8606}"/>
+              </a:ext>
+            </a:extLst>
+          </p:cNvPr>
+          <p:cNvSpPr/>
+          <p:nvPr/>
+        </p:nvSpPr>
+        <p:spPr>
+          <a:xfrm>
+            <a:off x="1947563" y="2900855"/>
+            <a:ext cx="722066" cy="294290"/>
+          </a:xfrm>
+          <a:prstGeom prst="rect">
+            <a:avLst/>
+          </a:prstGeom>
+          <a:solidFill>
+            <a:schemeClr val="bg1"/>
+          </a:solidFill>
+          <a:ln w="9525">
+            <a:noFill/>
+          </a:ln>
+        </p:spPr>
+        <p:style>
+          <a:lnRef idx="2">
+            <a:schemeClr val="accent1">
+              <a:shade val="15000"/>
+            </a:schemeClr>
+          </a:lnRef>
+          <a:fillRef idx="1">
+            <a:schemeClr val="accent1"/>
+          </a:fillRef>
+          <a:effectRef idx="0">
+            <a:schemeClr val="accent1"/>
+          </a:effectRef>
+          <a:fontRef idx="minor">
+            <a:schemeClr val="lt1"/>
+          </a:fontRef>
+        </p:style>
+        <p:txBody>
+          <a:bodyPr rtlCol="0" anchor="ctr"/>
+          <a:lstStyle/>
+          <a:p>
+            <a:pPr algn="ctr"/>
+            <a:endParaRPr lang="en-GB"/>
+          </a:p>
+        </p:txBody>
+      </p:sp>
+    </p:spTree>
+    <p:extLst>
+      <p:ext uri="{BB962C8B-B14F-4D97-AF65-F5344CB8AC3E}">
+        <p14:creationId xmlns:p14="http://schemas.microsoft.com/office/powerpoint/2010/main" val="3425146051"/>
+      </p:ext>
+    </p:extLst>
+  </p:cSld>
+  <p:clrMapOvr>
+    <a:masterClrMapping/>
+  </p:clrMapOvr>
+</p:sld>
+</file>
+
+<file path=ppt/slides/slide3.xml><?xml version="1.0" encoding="utf-8"?>
+<p:sld xmlns:a="http://schemas.openxmlformats.org/drawingml/2006/main" xmlns:r="http://schemas.openxmlformats.org/officeDocument/2006/relationships" xmlns:p="http://schemas.openxmlformats.org/presentationml/2006/main">
+  <p:cSld>
+    <p:spTree>
+      <p:nvGrpSpPr>
+        <p:cNvPr id="1" name=""/>
+        <p:cNvGrpSpPr/>
+        <p:nvPr/>
+      </p:nvGrpSpPr>
+      <p:grpSpPr>
+        <a:xfrm>
+          <a:off x="0" y="0"/>
+          <a:ext cx="0" cy="0"/>
+          <a:chOff x="0" y="0"/>
+          <a:chExt cx="0" cy="0"/>
+        </a:xfrm>
+      </p:grpSpPr>
+      <p:grpSp>
+        <p:nvGrpSpPr>
+          <p:cNvPr id="13" name="Group 12">
+            <a:extLst>
+              <a:ext uri="{FF2B5EF4-FFF2-40B4-BE49-F238E27FC236}">
+                <a16:creationId xmlns:a16="http://schemas.microsoft.com/office/drawing/2014/main" id="{9A6DC114-D857-D08C-4495-B4BF9CFA5E97}"/>
+              </a:ext>
+            </a:extLst>
+          </p:cNvPr>
+          <p:cNvGrpSpPr/>
+          <p:nvPr/>
+        </p:nvGrpSpPr>
+        <p:grpSpPr>
+          <a:xfrm>
+            <a:off x="565485" y="733924"/>
+            <a:ext cx="10672010" cy="926433"/>
+            <a:chOff x="565485" y="733924"/>
+            <a:chExt cx="10672010" cy="926433"/>
+          </a:xfrm>
+        </p:grpSpPr>
+        <p:sp>
+          <p:nvSpPr>
+            <p:cNvPr id="9" name="Rectangle 8">
+              <a:extLst>
+                <a:ext uri="{FF2B5EF4-FFF2-40B4-BE49-F238E27FC236}">
+                  <a16:creationId xmlns:a16="http://schemas.microsoft.com/office/drawing/2014/main" id="{D413BC9F-0022-B8F4-1803-FD272E313611}"/>
+                </a:ext>
+              </a:extLst>
+            </p:cNvPr>
+            <p:cNvSpPr/>
+            <p:nvPr/>
+          </p:nvSpPr>
+          <p:spPr>
+            <a:xfrm>
+              <a:off x="565485" y="733926"/>
+              <a:ext cx="2165684" cy="926431"/>
+            </a:xfrm>
+            <a:prstGeom prst="rect">
+              <a:avLst/>
+            </a:prstGeom>
+            <a:solidFill>
+              <a:schemeClr val="bg2"/>
+            </a:solidFill>
+          </p:spPr>
+          <p:style>
+            <a:lnRef idx="2">
+              <a:schemeClr val="accent1">
+                <a:shade val="15000"/>
+              </a:schemeClr>
+            </a:lnRef>
+            <a:fillRef idx="1">
+              <a:schemeClr val="accent1"/>
+            </a:fillRef>
+            <a:effectRef idx="0">
+              <a:schemeClr val="accent1"/>
+            </a:effectRef>
+            <a:fontRef idx="minor">
+              <a:schemeClr val="lt1"/>
+            </a:fontRef>
+          </p:style>
+          <p:txBody>
+            <a:bodyPr rtlCol="0" anchor="ctr"/>
+            <a:lstStyle/>
+            <a:p>
+              <a:pPr algn="ctr"/>
+              <a:r>
+                <a:rPr lang="en-GB" sz="2000" dirty="0">
+                  <a:solidFill>
+                    <a:sysClr val="windowText" lastClr="000000"/>
+                  </a:solidFill>
+                </a:rPr>
+                <a:t>Model Type</a:t>
+              </a:r>
+            </a:p>
+            <a:p>
+              <a:pPr algn="ctr"/>
+              <a:r>
+                <a:rPr lang="en-GB" sz="2000" dirty="0">
+                  <a:solidFill>
+                    <a:sysClr val="windowText" lastClr="000000"/>
+                  </a:solidFill>
+                </a:rPr>
+                <a:t>(2)</a:t>
+              </a:r>
+            </a:p>
+          </p:txBody>
+        </p:sp>
+        <p:sp>
+          <p:nvSpPr>
+            <p:cNvPr id="10" name="Rectangle 9">
+              <a:extLst>
+                <a:ext uri="{FF2B5EF4-FFF2-40B4-BE49-F238E27FC236}">
+                  <a16:creationId xmlns:a16="http://schemas.microsoft.com/office/drawing/2014/main" id="{9D050468-A947-727E-D0A7-13A630806A57}"/>
+                </a:ext>
+              </a:extLst>
+            </p:cNvPr>
+            <p:cNvSpPr/>
+            <p:nvPr/>
+          </p:nvSpPr>
+          <p:spPr>
+            <a:xfrm>
+              <a:off x="3400927" y="733925"/>
+              <a:ext cx="2165684" cy="926431"/>
+            </a:xfrm>
+            <a:prstGeom prst="rect">
+              <a:avLst/>
+            </a:prstGeom>
+            <a:solidFill>
+              <a:schemeClr val="bg2"/>
+            </a:solidFill>
+          </p:spPr>
+          <p:style>
+            <a:lnRef idx="2">
+              <a:schemeClr val="accent1">
+                <a:shade val="15000"/>
+              </a:schemeClr>
+            </a:lnRef>
+            <a:fillRef idx="1">
+              <a:schemeClr val="accent1"/>
+            </a:fillRef>
+            <a:effectRef idx="0">
+              <a:schemeClr val="accent1"/>
+            </a:effectRef>
+            <a:fontRef idx="minor">
+              <a:schemeClr val="lt1"/>
+            </a:fontRef>
+          </p:style>
+          <p:txBody>
+            <a:bodyPr rtlCol="0" anchor="ctr"/>
+            <a:lstStyle/>
+            <a:p>
+              <a:pPr algn="ctr"/>
+              <a:r>
+                <a:rPr lang="en-GB" sz="2000" dirty="0">
+                  <a:solidFill>
+                    <a:sysClr val="windowText" lastClr="000000"/>
+                  </a:solidFill>
+                </a:rPr>
+                <a:t>Protein</a:t>
+              </a:r>
+            </a:p>
+            <a:p>
+              <a:pPr algn="ctr"/>
+              <a:r>
+                <a:rPr lang="en-GB" sz="2000" dirty="0">
+                  <a:solidFill>
+                    <a:sysClr val="windowText" lastClr="000000"/>
+                  </a:solidFill>
+                </a:rPr>
+                <a:t>(8)</a:t>
+              </a:r>
+            </a:p>
+          </p:txBody>
+        </p:sp>
+        <p:sp>
+          <p:nvSpPr>
+            <p:cNvPr id="11" name="Rectangle 10">
+              <a:extLst>
+                <a:ext uri="{FF2B5EF4-FFF2-40B4-BE49-F238E27FC236}">
+                  <a16:creationId xmlns:a16="http://schemas.microsoft.com/office/drawing/2014/main" id="{44F9114F-3837-A993-5D8A-5C3DD8431925}"/>
+                </a:ext>
+              </a:extLst>
+            </p:cNvPr>
+            <p:cNvSpPr/>
+            <p:nvPr/>
+          </p:nvSpPr>
+          <p:spPr>
+            <a:xfrm>
+              <a:off x="6236369" y="733924"/>
+              <a:ext cx="2165684" cy="926431"/>
+            </a:xfrm>
+            <a:prstGeom prst="rect">
+              <a:avLst/>
+            </a:prstGeom>
+            <a:solidFill>
+              <a:schemeClr val="bg2"/>
+            </a:solidFill>
+          </p:spPr>
+          <p:style>
+            <a:lnRef idx="2">
+              <a:schemeClr val="accent1">
+                <a:shade val="15000"/>
+              </a:schemeClr>
+            </a:lnRef>
+            <a:fillRef idx="1">
+              <a:schemeClr val="accent1"/>
+            </a:fillRef>
+            <a:effectRef idx="0">
+              <a:schemeClr val="accent1"/>
+            </a:effectRef>
+            <a:fontRef idx="minor">
+              <a:schemeClr val="lt1"/>
+            </a:fontRef>
+          </p:style>
+          <p:txBody>
+            <a:bodyPr rtlCol="0" anchor="ctr"/>
+            <a:lstStyle/>
+            <a:p>
+              <a:pPr algn="ctr"/>
+              <a:r>
+                <a:rPr lang="en-GB" sz="2000" dirty="0">
+                  <a:solidFill>
+                    <a:sysClr val="windowText" lastClr="000000"/>
+                  </a:solidFill>
+                </a:rPr>
+                <a:t>Protein Feature Dataset (6)</a:t>
+              </a:r>
+            </a:p>
+          </p:txBody>
+        </p:sp>
+        <p:sp>
+          <p:nvSpPr>
+            <p:cNvPr id="12" name="Rectangle 11">
+              <a:extLst>
+                <a:ext uri="{FF2B5EF4-FFF2-40B4-BE49-F238E27FC236}">
+                  <a16:creationId xmlns:a16="http://schemas.microsoft.com/office/drawing/2014/main" id="{B93441FC-E8D8-B223-B360-10F1F61888EB}"/>
+                </a:ext>
+              </a:extLst>
+            </p:cNvPr>
+            <p:cNvSpPr/>
+            <p:nvPr/>
+          </p:nvSpPr>
+          <p:spPr>
+            <a:xfrm>
+              <a:off x="9071811" y="733924"/>
+              <a:ext cx="2165684" cy="926431"/>
+            </a:xfrm>
+            <a:prstGeom prst="rect">
+              <a:avLst/>
+            </a:prstGeom>
+            <a:solidFill>
+              <a:schemeClr val="bg2"/>
+            </a:solidFill>
+          </p:spPr>
+          <p:style>
+            <a:lnRef idx="2">
+              <a:schemeClr val="accent1">
+                <a:shade val="15000"/>
+              </a:schemeClr>
+            </a:lnRef>
+            <a:fillRef idx="1">
+              <a:schemeClr val="accent1"/>
+            </a:fillRef>
+            <a:effectRef idx="0">
+              <a:schemeClr val="accent1"/>
+            </a:effectRef>
+            <a:fontRef idx="minor">
+              <a:schemeClr val="lt1"/>
+            </a:fontRef>
+          </p:style>
+          <p:txBody>
+            <a:bodyPr rtlCol="0" anchor="ctr"/>
+            <a:lstStyle/>
+            <a:p>
+              <a:pPr algn="ctr"/>
+              <a:r>
+                <a:rPr lang="en-GB" sz="2000" dirty="0">
+                  <a:solidFill>
+                    <a:sysClr val="windowText" lastClr="000000"/>
+                  </a:solidFill>
+                </a:rPr>
+                <a:t>Virus Subtype Group (26)</a:t>
+              </a:r>
+            </a:p>
+          </p:txBody>
+        </p:sp>
+      </p:grpSp>
+      <p:sp>
+        <p:nvSpPr>
+          <p:cNvPr id="14" name="Rounded Rectangle 13">
+            <a:extLst>
+              <a:ext uri="{FF2B5EF4-FFF2-40B4-BE49-F238E27FC236}">
+                <a16:creationId xmlns:a16="http://schemas.microsoft.com/office/drawing/2014/main" id="{A7EB83F5-7A24-D326-677E-C084DF31AAD7}"/>
+              </a:ext>
+            </a:extLst>
+          </p:cNvPr>
+          <p:cNvSpPr/>
+          <p:nvPr/>
+        </p:nvSpPr>
+        <p:spPr>
+          <a:xfrm>
+            <a:off x="959143" y="2225841"/>
+            <a:ext cx="1378368" cy="721895"/>
+          </a:xfrm>
+          <a:prstGeom prst="roundRect">
+            <a:avLst/>
+          </a:prstGeom>
+          <a:noFill/>
+        </p:spPr>
+        <p:style>
+          <a:lnRef idx="2">
+            <a:schemeClr val="accent1">
+              <a:shade val="15000"/>
+            </a:schemeClr>
+          </a:lnRef>
+          <a:fillRef idx="1">
+            <a:schemeClr val="accent1"/>
+          </a:fillRef>
+          <a:effectRef idx="0">
+            <a:schemeClr val="accent1"/>
+          </a:effectRef>
+          <a:fontRef idx="minor">
+            <a:schemeClr val="lt1"/>
+          </a:fontRef>
+        </p:style>
+        <p:txBody>
+          <a:bodyPr rtlCol="0" anchor="ctr"/>
+          <a:lstStyle/>
+          <a:p>
+            <a:pPr algn="ctr"/>
+            <a:r>
+              <a:rPr lang="en-GB" dirty="0">
+                <a:solidFill>
+                  <a:sysClr val="windowText" lastClr="000000"/>
+                </a:solidFill>
+              </a:rPr>
+              <a:t>Two-class</a:t>
+            </a:r>
+          </a:p>
+          <a:p>
+            <a:pPr algn="ctr"/>
+            <a:r>
+              <a:rPr lang="en-GB" dirty="0">
+                <a:solidFill>
+                  <a:sysClr val="windowText" lastClr="000000"/>
+                </a:solidFill>
+              </a:rPr>
+              <a:t>Multi-class</a:t>
+            </a:r>
+          </a:p>
+        </p:txBody>
+      </p:sp>
+      <p:sp>
+        <p:nvSpPr>
+          <p:cNvPr id="15" name="Rounded Rectangle 14">
+            <a:extLst>
+              <a:ext uri="{FF2B5EF4-FFF2-40B4-BE49-F238E27FC236}">
+                <a16:creationId xmlns:a16="http://schemas.microsoft.com/office/drawing/2014/main" id="{B8E51E7A-9755-6F6D-89C8-8AE6E576C91F}"/>
+              </a:ext>
+            </a:extLst>
+          </p:cNvPr>
+          <p:cNvSpPr/>
+          <p:nvPr/>
+        </p:nvSpPr>
+        <p:spPr>
+          <a:xfrm>
+            <a:off x="3794585" y="2225841"/>
+            <a:ext cx="1378367" cy="1203159"/>
+          </a:xfrm>
+          <a:prstGeom prst="roundRect">
+            <a:avLst/>
+          </a:prstGeom>
+          <a:noFill/>
+        </p:spPr>
+        <p:style>
+          <a:lnRef idx="2">
+            <a:schemeClr val="accent1">
+              <a:shade val="15000"/>
+            </a:schemeClr>
+          </a:lnRef>
+          <a:fillRef idx="1">
+            <a:schemeClr val="accent1"/>
+          </a:fillRef>
+          <a:effectRef idx="0">
+            <a:schemeClr val="accent1"/>
+          </a:effectRef>
+          <a:fontRef idx="minor">
+            <a:schemeClr val="lt1"/>
+          </a:fontRef>
+        </p:style>
+        <p:txBody>
+          <a:bodyPr numCol="2" rtlCol="0" anchor="ctr"/>
+          <a:lstStyle/>
+          <a:p>
+            <a:pPr algn="ctr"/>
+            <a:r>
+              <a:rPr lang="en-GB" dirty="0">
+                <a:solidFill>
+                  <a:sysClr val="windowText" lastClr="000000"/>
+                </a:solidFill>
+              </a:rPr>
+              <a:t>PB2</a:t>
+            </a:r>
+          </a:p>
+          <a:p>
+            <a:pPr algn="ctr"/>
+            <a:r>
+              <a:rPr lang="en-GB" dirty="0">
+                <a:solidFill>
+                  <a:sysClr val="windowText" lastClr="000000"/>
+                </a:solidFill>
+              </a:rPr>
+              <a:t>PB1</a:t>
+            </a:r>
+          </a:p>
+          <a:p>
+            <a:pPr algn="ctr"/>
+            <a:r>
+              <a:rPr lang="en-GB" dirty="0">
+                <a:solidFill>
+                  <a:sysClr val="windowText" lastClr="000000"/>
+                </a:solidFill>
+              </a:rPr>
+              <a:t>PA</a:t>
+            </a:r>
+          </a:p>
+          <a:p>
+            <a:pPr algn="ctr"/>
+            <a:r>
+              <a:rPr lang="en-GB" dirty="0">
+                <a:solidFill>
+                  <a:sysClr val="windowText" lastClr="000000"/>
+                </a:solidFill>
+              </a:rPr>
+              <a:t>HA</a:t>
+            </a:r>
+          </a:p>
+          <a:p>
+            <a:pPr algn="ctr"/>
+            <a:r>
+              <a:rPr lang="en-GB" dirty="0">
+                <a:solidFill>
+                  <a:sysClr val="windowText" lastClr="000000"/>
+                </a:solidFill>
+              </a:rPr>
+              <a:t>NP</a:t>
+            </a:r>
+          </a:p>
+          <a:p>
+            <a:pPr algn="ctr"/>
+            <a:r>
+              <a:rPr lang="en-GB" dirty="0">
+                <a:solidFill>
+                  <a:sysClr val="windowText" lastClr="000000"/>
+                </a:solidFill>
+              </a:rPr>
+              <a:t>NA</a:t>
+            </a:r>
+          </a:p>
+          <a:p>
+            <a:pPr algn="ctr"/>
+            <a:r>
+              <a:rPr lang="en-GB" dirty="0">
+                <a:solidFill>
+                  <a:sysClr val="windowText" lastClr="000000"/>
+                </a:solidFill>
+              </a:rPr>
+              <a:t>M1</a:t>
+            </a:r>
+          </a:p>
+          <a:p>
+            <a:pPr algn="ctr"/>
+            <a:r>
+              <a:rPr lang="en-GB" dirty="0">
+                <a:solidFill>
+                  <a:sysClr val="windowText" lastClr="000000"/>
+                </a:solidFill>
+              </a:rPr>
+              <a:t>NS1</a:t>
+            </a:r>
+          </a:p>
+        </p:txBody>
+      </p:sp>
+      <p:sp>
+        <p:nvSpPr>
+          <p:cNvPr id="16" name="Rounded Rectangle 15">
+            <a:extLst>
+              <a:ext uri="{FF2B5EF4-FFF2-40B4-BE49-F238E27FC236}">
+                <a16:creationId xmlns:a16="http://schemas.microsoft.com/office/drawing/2014/main" id="{5B729D1A-3F7D-50EE-A6C5-A5ABD77205C3}"/>
+              </a:ext>
+            </a:extLst>
+          </p:cNvPr>
+          <p:cNvSpPr/>
+          <p:nvPr/>
+        </p:nvSpPr>
+        <p:spPr>
+          <a:xfrm>
+            <a:off x="6545180" y="2225842"/>
+            <a:ext cx="1548062" cy="1744580"/>
+          </a:xfrm>
+          <a:prstGeom prst="roundRect">
+            <a:avLst/>
+          </a:prstGeom>
+          <a:noFill/>
+        </p:spPr>
+        <p:style>
+          <a:lnRef idx="2">
+            <a:schemeClr val="accent1">
+              <a:shade val="15000"/>
+            </a:schemeClr>
+          </a:lnRef>
+          <a:fillRef idx="1">
+            <a:schemeClr val="accent1"/>
+          </a:fillRef>
+          <a:effectRef idx="0">
+            <a:schemeClr val="accent1"/>
+          </a:effectRef>
+          <a:fontRef idx="minor">
+            <a:schemeClr val="lt1"/>
+          </a:fontRef>
+        </p:style>
+        <p:txBody>
+          <a:bodyPr numCol="1" rtlCol="0" anchor="ctr"/>
+          <a:lstStyle/>
+          <a:p>
+            <a:pPr algn="ctr"/>
+            <a:r>
+              <a:rPr lang="en-GB" dirty="0" err="1">
+                <a:solidFill>
+                  <a:sysClr val="windowText" lastClr="000000"/>
+                </a:solidFill>
+              </a:rPr>
+              <a:t>CTDc</a:t>
+            </a:r>
+            <a:r>
+              <a:rPr lang="en-GB" dirty="0">
+                <a:solidFill>
+                  <a:sysClr val="windowText" lastClr="000000"/>
+                </a:solidFill>
+              </a:rPr>
+              <a:t> (39)</a:t>
+            </a:r>
+          </a:p>
+          <a:p>
+            <a:pPr algn="ctr"/>
+            <a:r>
+              <a:rPr lang="en-GB" dirty="0" err="1">
+                <a:solidFill>
+                  <a:sysClr val="windowText" lastClr="000000"/>
+                </a:solidFill>
+              </a:rPr>
+              <a:t>CTDd</a:t>
+            </a:r>
+            <a:r>
+              <a:rPr lang="en-GB" dirty="0">
+                <a:solidFill>
+                  <a:sysClr val="windowText" lastClr="000000"/>
+                </a:solidFill>
+              </a:rPr>
+              <a:t> (195)</a:t>
+            </a:r>
+          </a:p>
+          <a:p>
+            <a:pPr algn="ctr"/>
+            <a:r>
+              <a:rPr lang="en-GB" dirty="0" err="1">
+                <a:solidFill>
+                  <a:sysClr val="windowText" lastClr="000000"/>
+                </a:solidFill>
+              </a:rPr>
+              <a:t>CTDt</a:t>
+            </a:r>
+            <a:r>
+              <a:rPr lang="en-GB" dirty="0">
+                <a:solidFill>
+                  <a:sysClr val="windowText" lastClr="000000"/>
+                </a:solidFill>
+              </a:rPr>
+              <a:t> (39)</a:t>
+            </a:r>
+          </a:p>
+          <a:p>
+            <a:pPr algn="ctr"/>
+            <a:r>
+              <a:rPr lang="en-GB" dirty="0">
+                <a:solidFill>
+                  <a:sysClr val="windowText" lastClr="000000"/>
+                </a:solidFill>
+              </a:rPr>
+              <a:t>DPC (400)</a:t>
+            </a:r>
+          </a:p>
+          <a:p>
+            <a:pPr algn="ctr"/>
+            <a:r>
+              <a:rPr lang="en-GB" dirty="0">
+                <a:solidFill>
+                  <a:sysClr val="windowText" lastClr="000000"/>
+                </a:solidFill>
+              </a:rPr>
+              <a:t>PAAC (23)</a:t>
+            </a:r>
+          </a:p>
+          <a:p>
+            <a:pPr algn="ctr"/>
+            <a:r>
+              <a:rPr lang="en-GB" dirty="0" err="1">
+                <a:solidFill>
+                  <a:sysClr val="windowText" lastClr="000000"/>
+                </a:solidFill>
+              </a:rPr>
+              <a:t>Ctriad</a:t>
+            </a:r>
+            <a:r>
+              <a:rPr lang="en-GB" dirty="0">
+                <a:solidFill>
+                  <a:sysClr val="windowText" lastClr="000000"/>
+                </a:solidFill>
+              </a:rPr>
+              <a:t> (343)</a:t>
+            </a:r>
+          </a:p>
+        </p:txBody>
+      </p:sp>
+      <p:sp>
+        <p:nvSpPr>
+          <p:cNvPr id="17" name="Rounded Rectangle 16">
+            <a:extLst>
+              <a:ext uri="{FF2B5EF4-FFF2-40B4-BE49-F238E27FC236}">
+                <a16:creationId xmlns:a16="http://schemas.microsoft.com/office/drawing/2014/main" id="{F26271F0-0D24-E2F9-38ED-8BCDEE8F7DED}"/>
+              </a:ext>
+            </a:extLst>
+          </p:cNvPr>
+          <p:cNvSpPr/>
+          <p:nvPr/>
+        </p:nvSpPr>
+        <p:spPr>
+          <a:xfrm>
+            <a:off x="8682790" y="2225842"/>
+            <a:ext cx="2943726" cy="2586790"/>
+          </a:xfrm>
+          <a:prstGeom prst="roundRect">
+            <a:avLst/>
+          </a:prstGeom>
+          <a:noFill/>
+        </p:spPr>
+        <p:style>
+          <a:lnRef idx="2">
+            <a:schemeClr val="accent1">
+              <a:shade val="15000"/>
+            </a:schemeClr>
+          </a:lnRef>
+          <a:fillRef idx="1">
+            <a:schemeClr val="accent1"/>
+          </a:fillRef>
+          <a:effectRef idx="0">
+            <a:schemeClr val="accent1"/>
+          </a:effectRef>
+          <a:fontRef idx="minor">
+            <a:schemeClr val="lt1"/>
+          </a:fontRef>
+        </p:style>
+        <p:txBody>
+          <a:bodyPr numCol="3" rtlCol="0" anchor="ctr"/>
+          <a:lstStyle/>
+          <a:p>
+            <a:pPr algn="ctr"/>
+            <a:r>
+              <a:rPr lang="en-GB" dirty="0">
+                <a:solidFill>
+                  <a:sysClr val="windowText" lastClr="000000"/>
+                </a:solidFill>
+              </a:rPr>
+              <a:t>H10N7</a:t>
+            </a:r>
+          </a:p>
+          <a:p>
+            <a:pPr algn="ctr"/>
+            <a:r>
+              <a:rPr lang="en-GB" dirty="0">
+                <a:solidFill>
+                  <a:sysClr val="windowText" lastClr="000000"/>
+                </a:solidFill>
+              </a:rPr>
+              <a:t>H16N3</a:t>
+            </a:r>
+          </a:p>
+          <a:p>
+            <a:pPr algn="ctr"/>
+            <a:r>
+              <a:rPr lang="en-GB" dirty="0">
+                <a:solidFill>
+                  <a:sysClr val="windowText" lastClr="000000"/>
+                </a:solidFill>
+              </a:rPr>
+              <a:t>H17N10</a:t>
+            </a:r>
+          </a:p>
+          <a:p>
+            <a:pPr algn="ctr"/>
+            <a:r>
+              <a:rPr lang="en-GB" dirty="0">
+                <a:solidFill>
+                  <a:sysClr val="windowText" lastClr="000000"/>
+                </a:solidFill>
+              </a:rPr>
+              <a:t>H18N11</a:t>
+            </a:r>
+          </a:p>
+          <a:p>
+            <a:pPr algn="ctr"/>
+            <a:r>
+              <a:rPr lang="en-GB" dirty="0">
+                <a:solidFill>
+                  <a:sysClr val="windowText" lastClr="000000"/>
+                </a:solidFill>
+              </a:rPr>
+              <a:t>H1N1</a:t>
+            </a:r>
+          </a:p>
+          <a:p>
+            <a:pPr algn="ctr"/>
+            <a:r>
+              <a:rPr lang="en-GB" dirty="0">
+                <a:solidFill>
+                  <a:sysClr val="windowText" lastClr="000000"/>
+                </a:solidFill>
+              </a:rPr>
+              <a:t>H1N2</a:t>
+            </a:r>
+          </a:p>
+          <a:p>
+            <a:pPr algn="ctr"/>
+            <a:r>
+              <a:rPr lang="en-GB" dirty="0">
+                <a:solidFill>
+                  <a:sysClr val="windowText" lastClr="000000"/>
+                </a:solidFill>
+              </a:rPr>
+              <a:t>H3N2</a:t>
+            </a:r>
+          </a:p>
+          <a:p>
+            <a:pPr algn="ctr"/>
+            <a:r>
+              <a:rPr lang="en-GB" dirty="0">
+                <a:solidFill>
+                  <a:sysClr val="windowText" lastClr="000000"/>
+                </a:solidFill>
+              </a:rPr>
+              <a:t>H3N6</a:t>
+            </a:r>
+          </a:p>
+          <a:p>
+            <a:pPr algn="ctr"/>
+            <a:r>
+              <a:rPr lang="en-GB" dirty="0">
+                <a:solidFill>
+                  <a:sysClr val="windowText" lastClr="000000"/>
+                </a:solidFill>
+              </a:rPr>
+              <a:t>H3N8</a:t>
+            </a:r>
+          </a:p>
+          <a:p>
+            <a:pPr algn="ctr"/>
+            <a:r>
+              <a:rPr lang="en-GB" dirty="0">
+                <a:solidFill>
+                  <a:sysClr val="windowText" lastClr="000000"/>
+                </a:solidFill>
+              </a:rPr>
+              <a:t>H4N2</a:t>
+            </a:r>
+          </a:p>
+          <a:p>
+            <a:pPr algn="ctr"/>
+            <a:r>
+              <a:rPr lang="en-GB" dirty="0">
+                <a:solidFill>
+                  <a:sysClr val="windowText" lastClr="000000"/>
+                </a:solidFill>
+              </a:rPr>
+              <a:t>H4N6</a:t>
+            </a:r>
+          </a:p>
+          <a:p>
+            <a:pPr algn="ctr"/>
+            <a:r>
+              <a:rPr lang="en-GB" dirty="0">
+                <a:solidFill>
+                  <a:sysClr val="windowText" lastClr="000000"/>
+                </a:solidFill>
+              </a:rPr>
+              <a:t>H5N1</a:t>
+            </a:r>
+          </a:p>
+          <a:p>
+            <a:pPr algn="ctr"/>
+            <a:r>
+              <a:rPr lang="en-GB" dirty="0">
+                <a:solidFill>
+                  <a:sysClr val="windowText" lastClr="000000"/>
+                </a:solidFill>
+              </a:rPr>
+              <a:t>H5N2</a:t>
+            </a:r>
+          </a:p>
+          <a:p>
+            <a:pPr algn="ctr"/>
+            <a:r>
+              <a:rPr lang="en-GB" dirty="0">
+                <a:solidFill>
+                  <a:sysClr val="windowText" lastClr="000000"/>
+                </a:solidFill>
+              </a:rPr>
+              <a:t>H5N3</a:t>
+            </a:r>
+          </a:p>
+          <a:p>
+            <a:pPr algn="ctr"/>
+            <a:r>
+              <a:rPr lang="en-GB" dirty="0">
+                <a:solidFill>
+                  <a:sysClr val="windowText" lastClr="000000"/>
+                </a:solidFill>
+              </a:rPr>
+              <a:t>H5N5</a:t>
+            </a:r>
+          </a:p>
+          <a:p>
+            <a:pPr algn="ctr"/>
+            <a:r>
+              <a:rPr lang="en-GB" dirty="0">
+                <a:solidFill>
+                  <a:sysClr val="windowText" lastClr="000000"/>
+                </a:solidFill>
+              </a:rPr>
+              <a:t>H5N6</a:t>
+            </a:r>
+          </a:p>
+          <a:p>
+            <a:pPr algn="ctr"/>
+            <a:r>
+              <a:rPr lang="en-GB" dirty="0">
+                <a:solidFill>
+                  <a:sysClr val="windowText" lastClr="000000"/>
+                </a:solidFill>
+              </a:rPr>
+              <a:t>H5N8</a:t>
+            </a:r>
+          </a:p>
+          <a:p>
+            <a:pPr algn="ctr"/>
+            <a:r>
+              <a:rPr lang="en-GB" dirty="0">
+                <a:solidFill>
+                  <a:sysClr val="windowText" lastClr="000000"/>
+                </a:solidFill>
+              </a:rPr>
+              <a:t>H6N1</a:t>
+            </a:r>
+          </a:p>
+          <a:p>
+            <a:pPr algn="ctr"/>
+            <a:r>
+              <a:rPr lang="en-GB" dirty="0">
+                <a:solidFill>
+                  <a:sysClr val="windowText" lastClr="000000"/>
+                </a:solidFill>
+              </a:rPr>
+              <a:t>H6N2</a:t>
+            </a:r>
+          </a:p>
+          <a:p>
+            <a:pPr algn="ctr"/>
+            <a:r>
+              <a:rPr lang="en-GB" dirty="0">
+                <a:solidFill>
+                  <a:sysClr val="windowText" lastClr="000000"/>
+                </a:solidFill>
+              </a:rPr>
+              <a:t>H6N6</a:t>
+            </a:r>
+          </a:p>
+          <a:p>
+            <a:pPr algn="ctr"/>
+            <a:r>
+              <a:rPr lang="en-GB" dirty="0">
+                <a:solidFill>
+                  <a:sysClr val="windowText" lastClr="000000"/>
+                </a:solidFill>
+              </a:rPr>
+              <a:t>H7N1</a:t>
+            </a:r>
+          </a:p>
+          <a:p>
+            <a:pPr algn="ctr"/>
+            <a:r>
+              <a:rPr lang="en-GB" dirty="0">
+                <a:solidFill>
+                  <a:sysClr val="windowText" lastClr="000000"/>
+                </a:solidFill>
+              </a:rPr>
+              <a:t>H7N3</a:t>
+            </a:r>
+          </a:p>
+          <a:p>
+            <a:pPr algn="ctr"/>
+            <a:r>
+              <a:rPr lang="en-GB" dirty="0">
+                <a:solidFill>
+                  <a:sysClr val="windowText" lastClr="000000"/>
+                </a:solidFill>
+              </a:rPr>
+              <a:t>H7N7</a:t>
+            </a:r>
+          </a:p>
+          <a:p>
+            <a:pPr algn="ctr"/>
+            <a:r>
+              <a:rPr lang="en-GB" dirty="0">
+                <a:solidFill>
+                  <a:sysClr val="windowText" lastClr="000000"/>
+                </a:solidFill>
+              </a:rPr>
+              <a:t>H7N9</a:t>
+            </a:r>
+          </a:p>
+          <a:p>
+            <a:pPr algn="ctr"/>
+            <a:r>
+              <a:rPr lang="en-GB" dirty="0">
+                <a:solidFill>
+                  <a:sysClr val="windowText" lastClr="000000"/>
+                </a:solidFill>
+              </a:rPr>
+              <a:t>H9N2</a:t>
+            </a:r>
+          </a:p>
+          <a:p>
+            <a:pPr algn="ctr"/>
+            <a:r>
+              <a:rPr lang="en-GB" dirty="0">
+                <a:solidFill>
+                  <a:sysClr val="windowText" lastClr="000000"/>
+                </a:solidFill>
+              </a:rPr>
+              <a:t>Misc.</a:t>
+            </a:r>
+          </a:p>
+        </p:txBody>
+      </p:sp>
+      <p:cxnSp>
+        <p:nvCxnSpPr>
+          <p:cNvPr id="19" name="Straight Arrow Connector 18">
+            <a:extLst>
+              <a:ext uri="{FF2B5EF4-FFF2-40B4-BE49-F238E27FC236}">
+                <a16:creationId xmlns:a16="http://schemas.microsoft.com/office/drawing/2014/main" id="{6257DCEB-E16C-6942-62B2-68E775C08879}"/>
+              </a:ext>
+            </a:extLst>
+          </p:cNvPr>
+          <p:cNvCxnSpPr>
+            <a:stCxn id="9" idx="3"/>
+            <a:endCxn id="10" idx="1"/>
+          </p:cNvCxnSpPr>
+          <p:nvPr/>
+        </p:nvCxnSpPr>
+        <p:spPr>
+          <a:xfrm flipV="1">
+            <a:off x="2731169" y="1197141"/>
+            <a:ext cx="669758" cy="1"/>
+          </a:xfrm>
+          <a:prstGeom prst="straightConnector1">
+            <a:avLst/>
+          </a:prstGeom>
+          <a:ln w="28575">
+            <a:solidFill>
+              <a:schemeClr val="tx1"/>
+            </a:solidFill>
+            <a:tailEnd type="triangle"/>
+          </a:ln>
+        </p:spPr>
+        <p:style>
+          <a:lnRef idx="2">
+            <a:schemeClr val="accent1"/>
+          </a:lnRef>
+          <a:fillRef idx="0">
+            <a:schemeClr val="accent1"/>
+          </a:fillRef>
+          <a:effectRef idx="1">
+            <a:schemeClr val="accent1"/>
+          </a:effectRef>
+          <a:fontRef idx="minor">
+            <a:schemeClr val="tx1"/>
+          </a:fontRef>
+        </p:style>
+      </p:cxnSp>
+      <p:cxnSp>
+        <p:nvCxnSpPr>
+          <p:cNvPr id="20" name="Straight Arrow Connector 19">
+            <a:extLst>
+              <a:ext uri="{FF2B5EF4-FFF2-40B4-BE49-F238E27FC236}">
+                <a16:creationId xmlns:a16="http://schemas.microsoft.com/office/drawing/2014/main" id="{C4939E05-75D7-252C-70EF-0234104F6183}"/>
+              </a:ext>
+            </a:extLst>
+          </p:cNvPr>
+          <p:cNvCxnSpPr/>
+          <p:nvPr/>
+        </p:nvCxnSpPr>
+        <p:spPr>
+          <a:xfrm flipV="1">
+            <a:off x="5566611" y="1197138"/>
+            <a:ext cx="669758" cy="1"/>
+          </a:xfrm>
+          <a:prstGeom prst="straightConnector1">
+            <a:avLst/>
+          </a:prstGeom>
+          <a:ln w="28575">
+            <a:solidFill>
+              <a:schemeClr val="tx1"/>
+            </a:solidFill>
+            <a:tailEnd type="triangle"/>
+          </a:ln>
+        </p:spPr>
+        <p:style>
+          <a:lnRef idx="2">
+            <a:schemeClr val="accent1"/>
+          </a:lnRef>
+          <a:fillRef idx="0">
+            <a:schemeClr val="accent1"/>
+          </a:fillRef>
+          <a:effectRef idx="1">
+            <a:schemeClr val="accent1"/>
+          </a:effectRef>
+          <a:fontRef idx="minor">
+            <a:schemeClr val="tx1"/>
+          </a:fontRef>
+        </p:style>
+      </p:cxnSp>
+      <p:cxnSp>
+        <p:nvCxnSpPr>
+          <p:cNvPr id="21" name="Straight Arrow Connector 20">
+            <a:extLst>
+              <a:ext uri="{FF2B5EF4-FFF2-40B4-BE49-F238E27FC236}">
+                <a16:creationId xmlns:a16="http://schemas.microsoft.com/office/drawing/2014/main" id="{2C84524B-5057-AC30-0B1E-780E4181F306}"/>
+              </a:ext>
+            </a:extLst>
+          </p:cNvPr>
+          <p:cNvCxnSpPr/>
+          <p:nvPr/>
+        </p:nvCxnSpPr>
+        <p:spPr>
+          <a:xfrm flipV="1">
+            <a:off x="8402053" y="1197137"/>
+            <a:ext cx="669758" cy="1"/>
+          </a:xfrm>
+          <a:prstGeom prst="straightConnector1">
+            <a:avLst/>
+          </a:prstGeom>
+          <a:ln w="28575">
+            <a:solidFill>
+              <a:schemeClr val="tx1"/>
+            </a:solidFill>
+            <a:tailEnd type="triangle"/>
+          </a:ln>
+        </p:spPr>
+        <p:style>
+          <a:lnRef idx="2">
+            <a:schemeClr val="accent1"/>
+          </a:lnRef>
+          <a:fillRef idx="0">
+            <a:schemeClr val="accent1"/>
+          </a:fillRef>
+          <a:effectRef idx="1">
+            <a:schemeClr val="accent1"/>
+          </a:effectRef>
+          <a:fontRef idx="minor">
+            <a:schemeClr val="tx1"/>
+          </a:fontRef>
+        </p:style>
+      </p:cxnSp>
+    </p:spTree>
+    <p:extLst>
+      <p:ext uri="{BB962C8B-B14F-4D97-AF65-F5344CB8AC3E}">
+        <p14:creationId xmlns:p14="http://schemas.microsoft.com/office/powerpoint/2010/main" val="3353554868"/>
+      </p:ext>
+    </p:extLst>
+  </p:cSld>
+  <p:clrMapOvr>
+    <a:masterClrMapping/>
+  </p:clrMapOvr>
+</p:sld>
+</file>
+
 <file path=ppt/theme/theme1.xml><?xml version="1.0" encoding="utf-8"?>
 <a:theme xmlns:a="http://schemas.openxmlformats.org/drawingml/2006/main" name="Office Theme">
   <a:themeElements>
@@ -5987,4 +7801,319 @@
     </a:ext>
   </a:extLst>
 </a:theme>
+</file>
+
+<file path=ppt/theme/theme2.xml><?xml version="1.0" encoding="utf-8"?>
+<a:theme xmlns:a="http://schemas.openxmlformats.org/drawingml/2006/main" name="Office Theme">
+  <a:themeElements>
+    <a:clrScheme name="Office">
+      <a:dk1>
+        <a:sysClr val="windowText" lastClr="000000"/>
+      </a:dk1>
+      <a:lt1>
+        <a:sysClr val="window" lastClr="FFFFFF"/>
+      </a:lt1>
+      <a:dk2>
+        <a:srgbClr val="0E2841"/>
+      </a:dk2>
+      <a:lt2>
+        <a:srgbClr val="E8E8E8"/>
+      </a:lt2>
+      <a:accent1>
+        <a:srgbClr val="156082"/>
+      </a:accent1>
+      <a:accent2>
+        <a:srgbClr val="E97132"/>
+      </a:accent2>
+      <a:accent3>
+        <a:srgbClr val="196B24"/>
+      </a:accent3>
+      <a:accent4>
+        <a:srgbClr val="0F9ED5"/>
+      </a:accent4>
+      <a:accent5>
+        <a:srgbClr val="A02B93"/>
+      </a:accent5>
+      <a:accent6>
+        <a:srgbClr val="4EA72E"/>
+      </a:accent6>
+      <a:hlink>
+        <a:srgbClr val="467886"/>
+      </a:hlink>
+      <a:folHlink>
+        <a:srgbClr val="96607D"/>
+      </a:folHlink>
+    </a:clrScheme>
+    <a:fontScheme name="Office">
+      <a:majorFont>
+        <a:latin typeface="Aptos Display" panose="02110004020202020204"/>
+        <a:ea typeface=""/>
+        <a:cs typeface=""/>
+        <a:font script="Jpan" typeface="游ゴシック Light"/>
+        <a:font script="Hang" typeface="맑은 고딕"/>
+        <a:font script="Hans" typeface="等线 Light"/>
+        <a:font script="Hant" typeface="新細明體"/>
+        <a:font script="Arab" typeface="Times New Roman"/>
+        <a:font script="Hebr" typeface="Times New Roman"/>
+        <a:font script="Thai" typeface="Angsana New"/>
+        <a:font script="Ethi" typeface="Nyala"/>
+        <a:font script="Beng" typeface="Vrinda"/>
+        <a:font script="Gujr" typeface="Shruti"/>
+        <a:font script="Khmr" typeface="MoolBoran"/>
+        <a:font script="Knda" typeface="Tunga"/>
+        <a:font script="Guru" typeface="Raavi"/>
+        <a:font script="Cans" typeface="Euphemia"/>
+        <a:font script="Cher" typeface="Plantagenet Cherokee"/>
+        <a:font script="Yiii" typeface="Microsoft Yi Baiti"/>
+        <a:font script="Tibt" typeface="Microsoft Himalaya"/>
+        <a:font script="Thaa" typeface="MV Boli"/>
+        <a:font script="Deva" typeface="Mangal"/>
+        <a:font script="Telu" typeface="Gautami"/>
+        <a:font script="Taml" typeface="Latha"/>
+        <a:font script="Syrc" typeface="Estrangelo Edessa"/>
+        <a:font script="Orya" typeface="Kalinga"/>
+        <a:font script="Mlym" typeface="Kartika"/>
+        <a:font script="Laoo" typeface="DokChampa"/>
+        <a:font script="Sinh" typeface="Iskoola Pota"/>
+        <a:font script="Mong" typeface="Mongolian Baiti"/>
+        <a:font script="Viet" typeface="Times New Roman"/>
+        <a:font script="Uigh" typeface="Microsoft Uighur"/>
+        <a:font script="Geor" typeface="Sylfaen"/>
+        <a:font script="Armn" typeface="Arial"/>
+        <a:font script="Bugi" typeface="Leelawadee UI"/>
+        <a:font script="Bopo" typeface="Microsoft JhengHei"/>
+        <a:font script="Java" typeface="Javanese Text"/>
+        <a:font script="Lisu" typeface="Segoe UI"/>
+        <a:font script="Mymr" typeface="Myanmar Text"/>
+        <a:font script="Nkoo" typeface="Ebrima"/>
+        <a:font script="Olck" typeface="Nirmala UI"/>
+        <a:font script="Osma" typeface="Ebrima"/>
+        <a:font script="Phag" typeface="Phagspa"/>
+        <a:font script="Syrn" typeface="Estrangelo Edessa"/>
+        <a:font script="Syrj" typeface="Estrangelo Edessa"/>
+        <a:font script="Syre" typeface="Estrangelo Edessa"/>
+        <a:font script="Sora" typeface="Nirmala UI"/>
+        <a:font script="Tale" typeface="Microsoft Tai Le"/>
+        <a:font script="Talu" typeface="Microsoft New Tai Lue"/>
+        <a:font script="Tfng" typeface="Ebrima"/>
+      </a:majorFont>
+      <a:minorFont>
+        <a:latin typeface="Aptos" panose="02110004020202020204"/>
+        <a:ea typeface=""/>
+        <a:cs typeface=""/>
+        <a:font script="Jpan" typeface="游ゴシック"/>
+        <a:font script="Hang" typeface="맑은 고딕"/>
+        <a:font script="Hans" typeface="等线"/>
+        <a:font script="Hant" typeface="新細明體"/>
+        <a:font script="Arab" typeface="Arial"/>
+        <a:font script="Hebr" typeface="Arial"/>
+        <a:font script="Thai" typeface="Cordia New"/>
+        <a:font script="Ethi" typeface="Nyala"/>
+        <a:font script="Beng" typeface="Vrinda"/>
+        <a:font script="Gujr" typeface="Shruti"/>
+        <a:font script="Khmr" typeface="DaunPenh"/>
+        <a:font script="Knda" typeface="Tunga"/>
+        <a:font script="Guru" typeface="Raavi"/>
+        <a:font script="Cans" typeface="Euphemia"/>
+        <a:font script="Cher" typeface="Plantagenet Cherokee"/>
+        <a:font script="Yiii" typeface="Microsoft Yi Baiti"/>
+        <a:font script="Tibt" typeface="Microsoft Himalaya"/>
+        <a:font script="Thaa" typeface="MV Boli"/>
+        <a:font script="Deva" typeface="Mangal"/>
+        <a:font script="Telu" typeface="Gautami"/>
+        <a:font script="Taml" typeface="Latha"/>
+        <a:font script="Syrc" typeface="Estrangelo Edessa"/>
+        <a:font script="Orya" typeface="Kalinga"/>
+        <a:font script="Mlym" typeface="Kartika"/>
+        <a:font script="Laoo" typeface="DokChampa"/>
+        <a:font script="Sinh" typeface="Iskoola Pota"/>
+        <a:font script="Mong" typeface="Mongolian Baiti"/>
+        <a:font script="Viet" typeface="Arial"/>
+        <a:font script="Uigh" typeface="Microsoft Uighur"/>
+        <a:font script="Geor" typeface="Sylfaen"/>
+        <a:font script="Armn" typeface="Arial"/>
+        <a:font script="Bugi" typeface="Leelawadee UI"/>
+        <a:font script="Bopo" typeface="Microsoft JhengHei"/>
+        <a:font script="Java" typeface="Javanese Text"/>
+        <a:font script="Lisu" typeface="Segoe UI"/>
+        <a:font script="Mymr" typeface="Myanmar Text"/>
+        <a:font script="Nkoo" typeface="Ebrima"/>
+        <a:font script="Olck" typeface="Nirmala UI"/>
+        <a:font script="Osma" typeface="Ebrima"/>
+        <a:font script="Phag" typeface="Phagspa"/>
+        <a:font script="Syrn" typeface="Estrangelo Edessa"/>
+        <a:font script="Syrj" typeface="Estrangelo Edessa"/>
+        <a:font script="Syre" typeface="Estrangelo Edessa"/>
+        <a:font script="Sora" typeface="Nirmala UI"/>
+        <a:font script="Tale" typeface="Microsoft Tai Le"/>
+        <a:font script="Talu" typeface="Microsoft New Tai Lue"/>
+        <a:font script="Tfng" typeface="Ebrima"/>
+      </a:minorFont>
+    </a:fontScheme>
+    <a:fmtScheme name="Office">
+      <a:fillStyleLst>
+        <a:solidFill>
+          <a:schemeClr val="phClr"/>
+        </a:solidFill>
+        <a:gradFill rotWithShape="1">
+          <a:gsLst>
+            <a:gs pos="0">
+              <a:schemeClr val="phClr">
+                <a:lumMod val="110000"/>
+                <a:satMod val="105000"/>
+                <a:tint val="67000"/>
+              </a:schemeClr>
+            </a:gs>
+            <a:gs pos="50000">
+              <a:schemeClr val="phClr">
+                <a:lumMod val="105000"/>
+                <a:satMod val="103000"/>
+                <a:tint val="73000"/>
+              </a:schemeClr>
+            </a:gs>
+            <a:gs pos="100000">
+              <a:schemeClr val="phClr">
+                <a:lumMod val="105000"/>
+                <a:satMod val="109000"/>
+                <a:tint val="81000"/>
+              </a:schemeClr>
+            </a:gs>
+          </a:gsLst>
+          <a:lin ang="5400000" scaled="0"/>
+        </a:gradFill>
+        <a:gradFill rotWithShape="1">
+          <a:gsLst>
+            <a:gs pos="0">
+              <a:schemeClr val="phClr">
+                <a:satMod val="103000"/>
+                <a:lumMod val="102000"/>
+                <a:tint val="94000"/>
+              </a:schemeClr>
+            </a:gs>
+            <a:gs pos="50000">
+              <a:schemeClr val="phClr">
+                <a:satMod val="110000"/>
+                <a:lumMod val="100000"/>
+                <a:shade val="100000"/>
+              </a:schemeClr>
+            </a:gs>
+            <a:gs pos="100000">
+              <a:schemeClr val="phClr">
+                <a:lumMod val="99000"/>
+                <a:satMod val="120000"/>
+                <a:shade val="78000"/>
+              </a:schemeClr>
+            </a:gs>
+          </a:gsLst>
+          <a:lin ang="5400000" scaled="0"/>
+        </a:gradFill>
+      </a:fillStyleLst>
+      <a:lnStyleLst>
+        <a:ln w="12700" cap="flat" cmpd="sng" algn="ctr">
+          <a:solidFill>
+            <a:schemeClr val="phClr"/>
+          </a:solidFill>
+          <a:prstDash val="solid"/>
+          <a:miter lim="800000"/>
+        </a:ln>
+        <a:ln w="19050" cap="flat" cmpd="sng" algn="ctr">
+          <a:solidFill>
+            <a:schemeClr val="phClr"/>
+          </a:solidFill>
+          <a:prstDash val="solid"/>
+          <a:miter lim="800000"/>
+        </a:ln>
+        <a:ln w="25400" cap="flat" cmpd="sng" algn="ctr">
+          <a:solidFill>
+            <a:schemeClr val="phClr"/>
+          </a:solidFill>
+          <a:prstDash val="solid"/>
+          <a:miter lim="800000"/>
+        </a:ln>
+      </a:lnStyleLst>
+      <a:effectStyleLst>
+        <a:effectStyle>
+          <a:effectLst/>
+        </a:effectStyle>
+        <a:effectStyle>
+          <a:effectLst/>
+        </a:effectStyle>
+        <a:effectStyle>
+          <a:effectLst>
+            <a:outerShdw blurRad="57150" dist="19050" dir="5400000" algn="ctr" rotWithShape="0">
+              <a:srgbClr val="000000">
+                <a:alpha val="63000"/>
+              </a:srgbClr>
+            </a:outerShdw>
+          </a:effectLst>
+        </a:effectStyle>
+      </a:effectStyleLst>
+      <a:bgFillStyleLst>
+        <a:solidFill>
+          <a:schemeClr val="phClr"/>
+        </a:solidFill>
+        <a:solidFill>
+          <a:schemeClr val="phClr">
+            <a:tint val="95000"/>
+            <a:satMod val="170000"/>
+          </a:schemeClr>
+        </a:solidFill>
+        <a:gradFill rotWithShape="1">
+          <a:gsLst>
+            <a:gs pos="0">
+              <a:schemeClr val="phClr">
+                <a:tint val="93000"/>
+                <a:satMod val="150000"/>
+                <a:shade val="98000"/>
+                <a:lumMod val="102000"/>
+              </a:schemeClr>
+            </a:gs>
+            <a:gs pos="50000">
+              <a:schemeClr val="phClr">
+                <a:tint val="98000"/>
+                <a:satMod val="130000"/>
+                <a:shade val="90000"/>
+                <a:lumMod val="103000"/>
+              </a:schemeClr>
+            </a:gs>
+            <a:gs pos="100000">
+              <a:schemeClr val="phClr">
+                <a:shade val="63000"/>
+                <a:satMod val="120000"/>
+              </a:schemeClr>
+            </a:gs>
+          </a:gsLst>
+          <a:lin ang="5400000" scaled="0"/>
+        </a:gradFill>
+      </a:bgFillStyleLst>
+    </a:fmtScheme>
+  </a:themeElements>
+  <a:objectDefaults>
+    <a:lnDef>
+      <a:spPr/>
+      <a:bodyPr/>
+      <a:lstStyle/>
+      <a:style>
+        <a:lnRef idx="2">
+          <a:schemeClr val="accent1"/>
+        </a:lnRef>
+        <a:fillRef idx="0">
+          <a:schemeClr val="accent1"/>
+        </a:fillRef>
+        <a:effectRef idx="1">
+          <a:schemeClr val="accent1"/>
+        </a:effectRef>
+        <a:fontRef idx="minor">
+          <a:schemeClr val="tx1"/>
+        </a:fontRef>
+      </a:style>
+    </a:lnDef>
+  </a:objectDefaults>
+  <a:extraClrSchemeLst/>
+  <a:extLst>
+    <a:ext uri="{05A4C25C-085E-4340-85A3-A5531E510DB2}">
+      <thm15:themeFamily xmlns:thm15="http://schemas.microsoft.com/office/thememl/2012/main" name="Office Theme" id="{2E142A2C-CD16-42D6-873A-C26D2A0506FA}" vid="{1BDDFF52-6CD6-40A5-AB3C-68EB2F1E4D0A}"/>
+    </a:ext>
+  </a:extLst>
+</a:theme>
 </file>